--- a/presentations/b09-network/B09_Network_Narrated.pptx
+++ b/presentations/b09-network/B09_Network_Narrated.pptx
@@ -189,7 +189,7 @@
     </p:spTree>
     <p:extLst>
       <p:ext uri="{BB962C8B-B14F-4D97-AF65-F5344CB8AC3E}">
-        <p14:creationId xmlns:p14="http://schemas.microsoft.com/office/powerpoint/2010/main" val="671304180"/>
+        <p14:creationId xmlns:p14="http://schemas.microsoft.com/office/powerpoint/2010/main" val="3772732471"/>
       </p:ext>
     </p:extLst>
   </p:cSld>
@@ -2614,7 +2614,7 @@
             <a:hlinkClick r:id="" action="ppaction://media"/>
             <a:extLst>
               <a:ext uri="{FF2B5EF4-FFF2-40B4-BE49-F238E27FC236}">
-                <a16:creationId xmlns:a16="http://schemas.microsoft.com/office/drawing/2014/main" id="{D18667C2-7BB1-203E-7091-63BBDCF01B54}"/>
+                <a16:creationId xmlns:a16="http://schemas.microsoft.com/office/drawing/2014/main" id="{5D7ABA18-D698-1355-3D47-B7BAA668EB3C}"/>
               </a:ext>
             </a:extLst>
           </p:cNvPr>
@@ -2630,7 +2630,7 @@
                     <p:ext uri="{3AFAAA56-56D3-431D-BCD4-E75A35582382}">
                       <p173:tracksInfo xmlns:p173="http://schemas.microsoft.com/office/powerpoint/2017/3/main" displayLoc="slide">
                         <p173:trackLst>
-                          <p173:track id="{4DF81BA7-AE8F-43C8-9CB4-F413EEFCB52D}" label="English (captions)" lang="en-US" r:embed="rId6"/>
+                          <p173:track id="{209A4F42-FC89-4F8A-ADF9-2E19E0F95FC8}" label="English (captions)" lang="en-US" r:embed="rId6"/>
                         </p173:trackLst>
                       </p173:tracksInfo>
                     </p:ext>
@@ -2648,7 +2648,7 @@
         </p:blipFill>
         <p:spPr>
           <a:xfrm>
-            <a:off x="127000" y="6350000"/>
+            <a:off x="12446000" y="127000"/>
             <a:ext cx="304800" cy="304800"/>
           </a:xfrm>
           <a:prstGeom prst="rect">
@@ -4036,7 +4036,7 @@
             <a:hlinkClick r:id="" action="ppaction://media"/>
             <a:extLst>
               <a:ext uri="{FF2B5EF4-FFF2-40B4-BE49-F238E27FC236}">
-                <a16:creationId xmlns:a16="http://schemas.microsoft.com/office/drawing/2014/main" id="{87248EF8-332E-66D6-8A41-ADEF29FB8E9C}"/>
+                <a16:creationId xmlns:a16="http://schemas.microsoft.com/office/drawing/2014/main" id="{4A4F36B4-48C5-D85A-F2E6-FF048A86C9FC}"/>
               </a:ext>
             </a:extLst>
           </p:cNvPr>
@@ -4052,7 +4052,7 @@
                     <p:ext uri="{3AFAAA56-56D3-431D-BCD4-E75A35582382}">
                       <p173:tracksInfo xmlns:p173="http://schemas.microsoft.com/office/powerpoint/2017/3/main" displayLoc="slide">
                         <p173:trackLst>
-                          <p173:track id="{BC22D743-740E-4961-B15A-D81B8DFA8096}" label="English (captions)" lang="en-US" r:embed="rId9"/>
+                          <p173:track id="{AE716CA7-1EDC-4DC9-A501-128E7B475758}" label="English (captions)" lang="en-US" r:embed="rId9"/>
                         </p173:trackLst>
                       </p173:tracksInfo>
                     </p:ext>
@@ -4070,7 +4070,7 @@
         </p:blipFill>
         <p:spPr>
           <a:xfrm>
-            <a:off x="127000" y="6350000"/>
+            <a:off x="12446000" y="127000"/>
             <a:ext cx="304800" cy="304800"/>
           </a:xfrm>
           <a:prstGeom prst="rect">
@@ -5227,7 +5227,7 @@
             <a:hlinkClick r:id="" action="ppaction://media"/>
             <a:extLst>
               <a:ext uri="{FF2B5EF4-FFF2-40B4-BE49-F238E27FC236}">
-                <a16:creationId xmlns:a16="http://schemas.microsoft.com/office/drawing/2014/main" id="{E7CCCBB8-C495-514A-C5A6-9413797093CF}"/>
+                <a16:creationId xmlns:a16="http://schemas.microsoft.com/office/drawing/2014/main" id="{048DF66D-9AD4-26CA-9E31-FBEB288B2727}"/>
               </a:ext>
             </a:extLst>
           </p:cNvPr>
@@ -5243,7 +5243,7 @@
                     <p:ext uri="{3AFAAA56-56D3-431D-BCD4-E75A35582382}">
                       <p173:tracksInfo xmlns:p173="http://schemas.microsoft.com/office/powerpoint/2017/3/main" displayLoc="slide">
                         <p173:trackLst>
-                          <p173:track id="{94858F37-4EDF-4DD5-B480-223E8934367B}" label="English (captions)" lang="en-US" r:embed="rId8"/>
+                          <p173:track id="{25602BAF-7A6C-4FCC-9DCD-5B22431C6039}" label="English (captions)" lang="en-US" r:embed="rId8"/>
                         </p173:trackLst>
                       </p173:tracksInfo>
                     </p:ext>
@@ -5261,7 +5261,7 @@
         </p:blipFill>
         <p:spPr>
           <a:xfrm>
-            <a:off x="127000" y="6350000"/>
+            <a:off x="12446000" y="127000"/>
             <a:ext cx="304800" cy="304800"/>
           </a:xfrm>
           <a:prstGeom prst="rect">
@@ -6991,7 +6991,7 @@
             <a:hlinkClick r:id="" action="ppaction://media"/>
             <a:extLst>
               <a:ext uri="{FF2B5EF4-FFF2-40B4-BE49-F238E27FC236}">
-                <a16:creationId xmlns:a16="http://schemas.microsoft.com/office/drawing/2014/main" id="{10DA5138-449F-64E2-5321-3A7A1B67B5C2}"/>
+                <a16:creationId xmlns:a16="http://schemas.microsoft.com/office/drawing/2014/main" id="{FDF715A8-A30E-CEA0-BDD0-AB3B0A643F07}"/>
               </a:ext>
             </a:extLst>
           </p:cNvPr>
@@ -7007,7 +7007,7 @@
                     <p:ext uri="{3AFAAA56-56D3-431D-BCD4-E75A35582382}">
                       <p173:tracksInfo xmlns:p173="http://schemas.microsoft.com/office/powerpoint/2017/3/main" displayLoc="slide">
                         <p173:trackLst>
-                          <p173:track id="{5FFE4591-7065-4289-B2BF-C72EEA901069}" label="English (captions)" lang="en-US" r:embed="rId8"/>
+                          <p173:track id="{D3E8041A-2D58-4A27-9E27-A0D76FF07C0D}" label="English (captions)" lang="en-US" r:embed="rId8"/>
                         </p173:trackLst>
                       </p173:tracksInfo>
                     </p:ext>
@@ -7025,7 +7025,7 @@
         </p:blipFill>
         <p:spPr>
           <a:xfrm>
-            <a:off x="127000" y="6350000"/>
+            <a:off x="12446000" y="127000"/>
             <a:ext cx="304800" cy="304800"/>
           </a:xfrm>
           <a:prstGeom prst="rect">
@@ -8695,7 +8695,7 @@
             <a:hlinkClick r:id="" action="ppaction://media"/>
             <a:extLst>
               <a:ext uri="{FF2B5EF4-FFF2-40B4-BE49-F238E27FC236}">
-                <a16:creationId xmlns:a16="http://schemas.microsoft.com/office/drawing/2014/main" id="{1E850039-6356-DA99-9B15-853D1E2ACBD2}"/>
+                <a16:creationId xmlns:a16="http://schemas.microsoft.com/office/drawing/2014/main" id="{2C4AC3E3-14B1-E037-9F13-68634C1F3E97}"/>
               </a:ext>
             </a:extLst>
           </p:cNvPr>
@@ -8711,7 +8711,7 @@
                     <p:ext uri="{3AFAAA56-56D3-431D-BCD4-E75A35582382}">
                       <p173:tracksInfo xmlns:p173="http://schemas.microsoft.com/office/powerpoint/2017/3/main" displayLoc="slide">
                         <p173:trackLst>
-                          <p173:track id="{540C65FA-C0C5-4A3A-8FB7-50FD7CD7D4B8}" label="English (captions)" lang="en-US" r:embed="rId8"/>
+                          <p173:track id="{FE116913-E3BE-41E4-9746-411E12C81556}" label="English (captions)" lang="en-US" r:embed="rId8"/>
                         </p173:trackLst>
                       </p173:tracksInfo>
                     </p:ext>
@@ -8729,7 +8729,7 @@
         </p:blipFill>
         <p:spPr>
           <a:xfrm>
-            <a:off x="127000" y="6350000"/>
+            <a:off x="12446000" y="127000"/>
             <a:ext cx="304800" cy="304800"/>
           </a:xfrm>
           <a:prstGeom prst="rect">
@@ -10208,7 +10208,7 @@
             <a:hlinkClick r:id="" action="ppaction://media"/>
             <a:extLst>
               <a:ext uri="{FF2B5EF4-FFF2-40B4-BE49-F238E27FC236}">
-                <a16:creationId xmlns:a16="http://schemas.microsoft.com/office/drawing/2014/main" id="{E652D2B9-B72E-F29E-2599-0ED693F88617}"/>
+                <a16:creationId xmlns:a16="http://schemas.microsoft.com/office/drawing/2014/main" id="{7625326F-E585-9EC1-9947-A8FB65A3749B}"/>
               </a:ext>
             </a:extLst>
           </p:cNvPr>
@@ -10224,7 +10224,7 @@
                     <p:ext uri="{3AFAAA56-56D3-431D-BCD4-E75A35582382}">
                       <p173:tracksInfo xmlns:p173="http://schemas.microsoft.com/office/powerpoint/2017/3/main" displayLoc="slide">
                         <p173:trackLst>
-                          <p173:track id="{E8850799-D909-4289-B58F-C47E7D45D17C}" label="English (captions)" lang="en-US" r:embed="rId9"/>
+                          <p173:track id="{27FD40B8-2077-4769-961C-EA501C064DB4}" label="English (captions)" lang="en-US" r:embed="rId9"/>
                         </p173:trackLst>
                       </p173:tracksInfo>
                     </p:ext>
@@ -10242,7 +10242,7 @@
         </p:blipFill>
         <p:spPr>
           <a:xfrm>
-            <a:off x="127000" y="6350000"/>
+            <a:off x="12446000" y="127000"/>
             <a:ext cx="304800" cy="304800"/>
           </a:xfrm>
           <a:prstGeom prst="rect">
@@ -11311,7 +11311,7 @@
             <a:hlinkClick r:id="" action="ppaction://media"/>
             <a:extLst>
               <a:ext uri="{FF2B5EF4-FFF2-40B4-BE49-F238E27FC236}">
-                <a16:creationId xmlns:a16="http://schemas.microsoft.com/office/drawing/2014/main" id="{A745A781-712D-5FDA-EA4E-E20960EAC3C1}"/>
+                <a16:creationId xmlns:a16="http://schemas.microsoft.com/office/drawing/2014/main" id="{475F289A-0AD0-7E92-1647-80336504368B}"/>
               </a:ext>
             </a:extLst>
           </p:cNvPr>
@@ -11327,7 +11327,7 @@
                     <p:ext uri="{3AFAAA56-56D3-431D-BCD4-E75A35582382}">
                       <p173:tracksInfo xmlns:p173="http://schemas.microsoft.com/office/powerpoint/2017/3/main" displayLoc="slide">
                         <p173:trackLst>
-                          <p173:track id="{968CEC4C-C394-4521-A40E-7CC5469293F9}" label="English (captions)" lang="en-US" r:embed="rId11"/>
+                          <p173:track id="{45FF4291-C26A-46BE-A089-06D47724F9F1}" label="English (captions)" lang="en-US" r:embed="rId11"/>
                         </p173:trackLst>
                       </p173:tracksInfo>
                     </p:ext>
@@ -11345,7 +11345,7 @@
         </p:blipFill>
         <p:spPr>
           <a:xfrm>
-            <a:off x="127000" y="6350000"/>
+            <a:off x="12446000" y="127000"/>
             <a:ext cx="304800" cy="304800"/>
           </a:xfrm>
           <a:prstGeom prst="rect">
@@ -13519,7 +13519,7 @@
             <a:hlinkClick r:id="" action="ppaction://media"/>
             <a:extLst>
               <a:ext uri="{FF2B5EF4-FFF2-40B4-BE49-F238E27FC236}">
-                <a16:creationId xmlns:a16="http://schemas.microsoft.com/office/drawing/2014/main" id="{71352A91-64D2-FBE4-4522-268BB9D1AA86}"/>
+                <a16:creationId xmlns:a16="http://schemas.microsoft.com/office/drawing/2014/main" id="{E3BCA834-4463-D240-DCAC-B43489D59045}"/>
               </a:ext>
             </a:extLst>
           </p:cNvPr>
@@ -13535,7 +13535,7 @@
                     <p:ext uri="{3AFAAA56-56D3-431D-BCD4-E75A35582382}">
                       <p173:tracksInfo xmlns:p173="http://schemas.microsoft.com/office/powerpoint/2017/3/main" displayLoc="slide">
                         <p173:trackLst>
-                          <p173:track id="{4477E773-4D24-4E97-A9BC-5E3B140908B8}" label="English (captions)" lang="en-US" r:embed="rId8"/>
+                          <p173:track id="{22C45209-CB67-40AB-BC5C-592773DF4297}" label="English (captions)" lang="en-US" r:embed="rId8"/>
                         </p173:trackLst>
                       </p173:tracksInfo>
                     </p:ext>
@@ -13553,7 +13553,7 @@
         </p:blipFill>
         <p:spPr>
           <a:xfrm>
-            <a:off x="127000" y="6350000"/>
+            <a:off x="12446000" y="127000"/>
             <a:ext cx="304800" cy="304800"/>
           </a:xfrm>
           <a:prstGeom prst="rect">
@@ -15748,7 +15748,7 @@
             <a:hlinkClick r:id="" action="ppaction://media"/>
             <a:extLst>
               <a:ext uri="{FF2B5EF4-FFF2-40B4-BE49-F238E27FC236}">
-                <a16:creationId xmlns:a16="http://schemas.microsoft.com/office/drawing/2014/main" id="{4B810B0D-C82C-D2A3-8B33-ECCF199914C2}"/>
+                <a16:creationId xmlns:a16="http://schemas.microsoft.com/office/drawing/2014/main" id="{39D4C654-2A30-3D57-AF6E-F2F1257B2E7C}"/>
               </a:ext>
             </a:extLst>
           </p:cNvPr>
@@ -15764,7 +15764,7 @@
                     <p:ext uri="{3AFAAA56-56D3-431D-BCD4-E75A35582382}">
                       <p173:tracksInfo xmlns:p173="http://schemas.microsoft.com/office/powerpoint/2017/3/main" displayLoc="slide">
                         <p173:trackLst>
-                          <p173:track id="{1416CE3F-3805-4001-A459-DA96CE84CA8B}" label="English (captions)" lang="en-US" r:embed="rId8"/>
+                          <p173:track id="{447B4A86-BE24-4E42-8E8E-9C985857A85C}" label="English (captions)" lang="en-US" r:embed="rId8"/>
                         </p173:trackLst>
                       </p173:tracksInfo>
                     </p:ext>
@@ -15782,7 +15782,7 @@
         </p:blipFill>
         <p:spPr>
           <a:xfrm>
-            <a:off x="127000" y="6350000"/>
+            <a:off x="12446000" y="127000"/>
             <a:ext cx="304800" cy="304800"/>
           </a:xfrm>
           <a:prstGeom prst="rect">
@@ -16937,7 +16937,7 @@
             <a:hlinkClick r:id="" action="ppaction://media"/>
             <a:extLst>
               <a:ext uri="{FF2B5EF4-FFF2-40B4-BE49-F238E27FC236}">
-                <a16:creationId xmlns:a16="http://schemas.microsoft.com/office/drawing/2014/main" id="{16B3304D-1B04-DC8B-0819-4ECED223E04B}"/>
+                <a16:creationId xmlns:a16="http://schemas.microsoft.com/office/drawing/2014/main" id="{D54EAA89-8ECF-C8E3-533E-1BDE3C819376}"/>
               </a:ext>
             </a:extLst>
           </p:cNvPr>
@@ -16953,7 +16953,7 @@
                     <p:ext uri="{3AFAAA56-56D3-431D-BCD4-E75A35582382}">
                       <p173:tracksInfo xmlns:p173="http://schemas.microsoft.com/office/powerpoint/2017/3/main" displayLoc="slide">
                         <p173:trackLst>
-                          <p173:track id="{BFE49CB9-7215-4C95-AC3E-819F51BA9DA8}" label="English (captions)" lang="en-US" r:embed="rId10"/>
+                          <p173:track id="{F7E7E751-BDC4-4904-BC26-06B8301AD52C}" label="English (captions)" lang="en-US" r:embed="rId10"/>
                         </p173:trackLst>
                       </p173:tracksInfo>
                     </p:ext>
@@ -16971,7 +16971,7 @@
         </p:blipFill>
         <p:spPr>
           <a:xfrm>
-            <a:off x="127000" y="6350000"/>
+            <a:off x="12446000" y="127000"/>
             <a:ext cx="304800" cy="304800"/>
           </a:xfrm>
           <a:prstGeom prst="rect">
@@ -18072,7 +18072,7 @@
             <a:hlinkClick r:id="" action="ppaction://media"/>
             <a:extLst>
               <a:ext uri="{FF2B5EF4-FFF2-40B4-BE49-F238E27FC236}">
-                <a16:creationId xmlns:a16="http://schemas.microsoft.com/office/drawing/2014/main" id="{6359CE75-27C2-2ED4-F676-75D1BD7419B1}"/>
+                <a16:creationId xmlns:a16="http://schemas.microsoft.com/office/drawing/2014/main" id="{783F289C-C183-B17B-D0C7-A970C2E618FE}"/>
               </a:ext>
             </a:extLst>
           </p:cNvPr>
@@ -18088,7 +18088,7 @@
                     <p:ext uri="{3AFAAA56-56D3-431D-BCD4-E75A35582382}">
                       <p173:tracksInfo xmlns:p173="http://schemas.microsoft.com/office/powerpoint/2017/3/main" displayLoc="slide">
                         <p173:trackLst>
-                          <p173:track id="{3FCD5C8A-976F-425A-B8C6-996620F05461}" label="English (captions)" lang="en-US" r:embed="rId10"/>
+                          <p173:track id="{772260F1-750E-4CFB-A494-0BF84C6F8FF5}" label="English (captions)" lang="en-US" r:embed="rId10"/>
                         </p173:trackLst>
                       </p173:tracksInfo>
                     </p:ext>
@@ -18106,7 +18106,7 @@
         </p:blipFill>
         <p:spPr>
           <a:xfrm>
-            <a:off x="127000" y="6350000"/>
+            <a:off x="12446000" y="127000"/>
             <a:ext cx="304800" cy="304800"/>
           </a:xfrm>
           <a:prstGeom prst="rect">
@@ -19347,7 +19347,7 @@
             <a:hlinkClick r:id="" action="ppaction://media"/>
             <a:extLst>
               <a:ext uri="{FF2B5EF4-FFF2-40B4-BE49-F238E27FC236}">
-                <a16:creationId xmlns:a16="http://schemas.microsoft.com/office/drawing/2014/main" id="{FD525818-19CD-E72E-869F-F323A90E4CD7}"/>
+                <a16:creationId xmlns:a16="http://schemas.microsoft.com/office/drawing/2014/main" id="{CC8C92BC-4611-CB9E-04FB-C0435C43E002}"/>
               </a:ext>
             </a:extLst>
           </p:cNvPr>
@@ -19363,7 +19363,7 @@
                     <p:ext uri="{3AFAAA56-56D3-431D-BCD4-E75A35582382}">
                       <p173:tracksInfo xmlns:p173="http://schemas.microsoft.com/office/powerpoint/2017/3/main" displayLoc="slide">
                         <p173:trackLst>
-                          <p173:track id="{F4794370-24A8-41B6-88C0-8F371A323925}" label="English (captions)" lang="en-US" r:embed="rId8"/>
+                          <p173:track id="{CFF30EF6-C026-498D-9B12-FA8FE520D512}" label="English (captions)" lang="en-US" r:embed="rId8"/>
                         </p173:trackLst>
                       </p173:tracksInfo>
                     </p:ext>
@@ -19381,7 +19381,7 @@
         </p:blipFill>
         <p:spPr>
           <a:xfrm>
-            <a:off x="127000" y="6350000"/>
+            <a:off x="12446000" y="127000"/>
             <a:ext cx="304800" cy="304800"/>
           </a:xfrm>
           <a:prstGeom prst="rect">
@@ -20518,7 +20518,7 @@
             <a:hlinkClick r:id="" action="ppaction://media"/>
             <a:extLst>
               <a:ext uri="{FF2B5EF4-FFF2-40B4-BE49-F238E27FC236}">
-                <a16:creationId xmlns:a16="http://schemas.microsoft.com/office/drawing/2014/main" id="{6F14682D-71B7-2FAF-FF46-376B215C34EF}"/>
+                <a16:creationId xmlns:a16="http://schemas.microsoft.com/office/drawing/2014/main" id="{C1175D66-5D30-7070-215F-B4B9B0B66402}"/>
               </a:ext>
             </a:extLst>
           </p:cNvPr>
@@ -20534,7 +20534,7 @@
                     <p:ext uri="{3AFAAA56-56D3-431D-BCD4-E75A35582382}">
                       <p173:tracksInfo xmlns:p173="http://schemas.microsoft.com/office/powerpoint/2017/3/main" displayLoc="slide">
                         <p173:trackLst>
-                          <p173:track id="{EA11AF15-8900-4DC1-8F54-3267EDFE2A35}" label="English (captions)" lang="en-US" r:embed="rId10"/>
+                          <p173:track id="{A7BF621A-CAFA-4135-85D0-A325EBBA7991}" label="English (captions)" lang="en-US" r:embed="rId10"/>
                         </p173:trackLst>
                       </p173:tracksInfo>
                     </p:ext>
@@ -20552,7 +20552,7 @@
         </p:blipFill>
         <p:spPr>
           <a:xfrm>
-            <a:off x="127000" y="6350000"/>
+            <a:off x="12446000" y="127000"/>
             <a:ext cx="304800" cy="304800"/>
           </a:xfrm>
           <a:prstGeom prst="rect">
@@ -22554,7 +22554,7 @@
             <a:hlinkClick r:id="" action="ppaction://media"/>
             <a:extLst>
               <a:ext uri="{FF2B5EF4-FFF2-40B4-BE49-F238E27FC236}">
-                <a16:creationId xmlns:a16="http://schemas.microsoft.com/office/drawing/2014/main" id="{C084EF53-F0C1-CB9A-3031-6DCA4FC5BA19}"/>
+                <a16:creationId xmlns:a16="http://schemas.microsoft.com/office/drawing/2014/main" id="{3FA28779-84DA-DF16-C5D0-769E2ADD72F2}"/>
               </a:ext>
             </a:extLst>
           </p:cNvPr>
@@ -22570,7 +22570,7 @@
                     <p:ext uri="{3AFAAA56-56D3-431D-BCD4-E75A35582382}">
                       <p173:tracksInfo xmlns:p173="http://schemas.microsoft.com/office/powerpoint/2017/3/main" displayLoc="slide">
                         <p173:trackLst>
-                          <p173:track id="{7A9E5EB4-BA89-4516-880D-82FE1D7DF13F}" label="English (captions)" lang="en-US" r:embed="rId8"/>
+                          <p173:track id="{C8D4F4CA-D9D6-4034-9695-2BEA7E60B95F}" label="English (captions)" lang="en-US" r:embed="rId8"/>
                         </p173:trackLst>
                       </p173:tracksInfo>
                     </p:ext>
@@ -22588,7 +22588,7 @@
         </p:blipFill>
         <p:spPr>
           <a:xfrm>
-            <a:off x="127000" y="6350000"/>
+            <a:off x="12446000" y="127000"/>
             <a:ext cx="304800" cy="304800"/>
           </a:xfrm>
           <a:prstGeom prst="rect">
@@ -23981,7 +23981,7 @@
             <a:hlinkClick r:id="" action="ppaction://media"/>
             <a:extLst>
               <a:ext uri="{FF2B5EF4-FFF2-40B4-BE49-F238E27FC236}">
-                <a16:creationId xmlns:a16="http://schemas.microsoft.com/office/drawing/2014/main" id="{CBB153B7-4CDF-57A6-C079-289FBA72AB6D}"/>
+                <a16:creationId xmlns:a16="http://schemas.microsoft.com/office/drawing/2014/main" id="{119B9025-6C11-50E0-B3C6-FC30DF31BEBF}"/>
               </a:ext>
             </a:extLst>
           </p:cNvPr>
@@ -23997,7 +23997,7 @@
                     <p:ext uri="{3AFAAA56-56D3-431D-BCD4-E75A35582382}">
                       <p173:tracksInfo xmlns:p173="http://schemas.microsoft.com/office/powerpoint/2017/3/main" displayLoc="slide">
                         <p173:trackLst>
-                          <p173:track id="{8165F478-4B32-46A3-8DC5-82439528D6EB}" label="English (captions)" lang="en-US" r:embed="rId7"/>
+                          <p173:track id="{5811C4E8-04A4-4088-8EFA-BBE83AEB7EEF}" label="English (captions)" lang="en-US" r:embed="rId7"/>
                         </p173:trackLst>
                       </p173:tracksInfo>
                     </p:ext>
@@ -24015,7 +24015,7 @@
         </p:blipFill>
         <p:spPr>
           <a:xfrm>
-            <a:off x="127000" y="6350000"/>
+            <a:off x="12446000" y="127000"/>
             <a:ext cx="304800" cy="304800"/>
           </a:xfrm>
           <a:prstGeom prst="rect">
